--- a/docs/instructions/English/EU_SAE_Workbench_Guide_3_Estimating_Poverty_and_Welfare.pptx
+++ b/docs/instructions/English/EU_SAE_Workbench_Guide_3_Estimating_Poverty_and_Welfare.pptx
@@ -1366,7 +1366,7 @@
           <a:p>
             <a:r>
               <a:rPr lang="en-US" dirty="0"/>
-              <a:t>The target is arithmetic mean welfare. UFH log applies the selected variance option to delta variances V/mean^2; sm_all is the default, while direct and sm_out are available and saved. MFH defaults to sm_all / rho_sm_all on the log scale. The optional sm_out cutoff remains 0.001 on that scale. Corrected UFH predictions are unavailable without a direct estimate; none returns exp(eta). Historical example results retain their old settings.</a:t>
+              <a:t>The target is arithmetic mean welfare. UFH log applies the selected variance option to delta variances V/mean^2; sm_out is the default, while direct and sm_all are available and saved. MFH defaults to sm_out / rho_sm_out on the log scale. The sm_out cutoff remains 0.001 on that scale. Corrected UFH predictions are unavailable without a direct estimate; none returns exp(eta). Historical example results retain their old settings.</a:t>
             </a:r>
             <a:endParaRPr lang="en-US" dirty="0"/>
           </a:p>
@@ -2246,7 +2246,7 @@
           <a:p>
             <a:r>
               <a:rPr lang="en-US" dirty="0"/>
-              <a:t>UFH FGT0 arcsin retains its analytical effective-sample-size variance; invalid effective sample size falls back to observed sample size. UFH without transformation defaults to sm_all. MFH defaults to sm_all with rho_sm_all. Optional sm_out replaces only missing, nonfinite or strictly below-0.001 variances; it does not replace large variances. Explicit saved choices remain valid. Boundary change significance remains provisional. Historical w5o examples used sm_out / rho_sm_out and 100 replicates.</a:t>
+              <a:t>UFH FGT0 arcsin retains its analytical effective-sample-size variance; invalid effective sample size falls back to observed sample size. UFH without transformation defaults to sm_out. MFH defaults to sm_out with rho_sm_out. sm_out replaces only missing, nonfinite or strictly below-0.001 variances; it does not replace large variances. Optional sm_all replaces all variances with GVF predictions from sample size alone, which can overstate the variances of low-poverty areas and make MFH RMSEs nearly constant (guidelines note, Section 6.6). Explicit saved choices remain valid. Boundary change significance remains provisional. Historical w5o examples used sm_out / rho_sm_out and 100 replicates.</a:t>
             </a:r>
             <a:endParaRPr lang="en-US" dirty="0"/>
           </a:p>
@@ -12204,7 +12204,7 @@
                           <a:ea typeface="Calibri" pitchFamily="34" charset="-122"/>
                           <a:cs typeface="Calibri" pitchFamily="34" charset="-120"/>
                         </a:rPr>
-                        <a:t>sm_all</a:t>
+                        <a:t>sm_out</a:t>
                       </a:r>
                       <a:endParaRPr lang="en-US" sz="1200" dirty="0">
                         <a:latin typeface="Calibri" charset="0"/>
@@ -12272,7 +12272,7 @@
                           <a:ea typeface="Calibri" pitchFamily="34" charset="-122"/>
                           <a:cs typeface="Calibri" pitchFamily="34" charset="-120"/>
                         </a:rPr>
-                        <a:t>UFH log honors the selector; MFH uses rho_sm_all</a:t>
+                        <a:t>UFH log honors the selector; MFH uses rho_sm_out</a:t>
                       </a:r>
                       <a:endParaRPr lang="en-US" sz="1200" dirty="0">
                         <a:latin typeface="Calibri" charset="0"/>
@@ -12569,7 +12569,7 @@
                   <a:srgbClr val="5B6B86"/>
                 </a:solidFill>
               </a:rPr>
-              <a:t>Historical w5o, Route B: sm_out / rho_sm_out, 100 replicates. New defaults were not rerun.</a:t>
+              <a:t>Historical w5o, Route B: sm_out / rho_sm_out (current defaults), 100 replicates.</a:t>
             </a:r>
             <a:endParaRPr lang="en-US" sz="1400" dirty="0"/>
           </a:p>
@@ -20171,7 +20171,7 @@
                           <a:ea typeface="Calibri" pitchFamily="34" charset="-122"/>
                           <a:cs typeface="Calibri" pitchFamily="34" charset="-120"/>
                         </a:rPr>
-                        <a:t>sm_all, rho_sm_all</a:t>
+                        <a:t>sm_out, rho_sm_out</a:t>
                       </a:r>
                       <a:endParaRPr lang="en-US" sz="1200" dirty="0">
                         <a:latin typeface="Calibri" charset="0"/>
@@ -20239,7 +20239,7 @@
                           <a:ea typeface="Calibri" pitchFamily="34" charset="-122"/>
                           <a:cs typeface="Calibri" pitchFamily="34" charset="-120"/>
                         </a:rPr>
-                        <a:t>Fully smoothed working variances with national sampling correlation</a:t>
+                        <a:t>Direct variances (GVF below 0.001) with national sampling correlation</a:t>
                       </a:r>
                       <a:endParaRPr lang="en-US" sz="1200" dirty="0">
                         <a:latin typeface="Calibri" charset="0"/>
@@ -20948,7 +20948,7 @@
                   <a:srgbClr val="5B6B86"/>
                 </a:solidFill>
               </a:rPr>
-              <a:t>Historical w5o: sm_out / rho_sm_out, 100 replicates. Not results from the new defaults.</a:t>
+              <a:t>Historical w5o: sm_out / rho_sm_out (current defaults), 100 replicates.</a:t>
             </a:r>
             <a:endParaRPr lang="en-US" sz="1400" dirty="0"/>
           </a:p>
